--- a/book/slides/pptx/ch05-binary-tree.pptx
+++ b/book/slides/pptx/ch05-binary-tree.pptx
@@ -23102,4 +23102,116 @@
     </a:fmtScheme>
   </a:themeElements>
 </a:theme>
+</file>
+
+<file path=ppt/theme/theme2.xml><?xml version="1.0" encoding="utf-8"?>
+<a:theme xmlns:a="http://schemas.openxmlformats.org/drawingml/2006/main" name="dsa">
+  <a:themeElements>
+    <a:clrScheme name="dsa">
+      <a:dk1>
+        <a:sysClr val="windowText" lastClr="000000"/>
+      </a:dk1>
+      <a:lt1>
+        <a:sysClr val="window" lastClr="FFFFFF"/>
+      </a:lt1>
+      <a:dk2>
+        <a:srgbClr val="1A1A18"/>
+      </a:dk2>
+      <a:lt2>
+        <a:srgbClr val="FDFDFC"/>
+      </a:lt2>
+      <a:accent1>
+        <a:srgbClr val="8A4B2A"/>
+      </a:accent1>
+      <a:accent2>
+        <a:srgbClr val="2C6B57"/>
+      </a:accent2>
+      <a:accent3>
+        <a:srgbClr val="7A5C1E"/>
+      </a:accent3>
+      <a:accent4>
+        <a:srgbClr val="4A5AA8"/>
+      </a:accent4>
+      <a:accent5>
+        <a:srgbClr val="6B6B66"/>
+      </a:accent5>
+      <a:accent6>
+        <a:srgbClr val="DCDCD6"/>
+      </a:accent6>
+      <a:hlink>
+        <a:srgbClr val="8A4B2A"/>
+      </a:hlink>
+      <a:folHlink>
+        <a:srgbClr val="6B6B66"/>
+      </a:folHlink>
+    </a:clrScheme>
+    <a:fontScheme name="dsa">
+      <a:majorFont>
+        <a:latin typeface="Segoe UI"/>
+        <a:ea typeface="Noto Sans CJK SC"/>
+        <a:cs typeface=""/>
+      </a:majorFont>
+      <a:minorFont>
+        <a:latin typeface="Segoe UI"/>
+        <a:ea typeface="Noto Sans CJK SC"/>
+        <a:cs typeface=""/>
+      </a:minorFont>
+    </a:fontScheme>
+    <a:fmtScheme name="dsa">
+      <a:fillStyleLst>
+        <a:solidFill>
+          <a:schemeClr val="phClr"/>
+        </a:solidFill>
+        <a:solidFill>
+          <a:schemeClr val="phClr"/>
+        </a:solidFill>
+        <a:solidFill>
+          <a:schemeClr val="phClr"/>
+        </a:solidFill>
+      </a:fillStyleLst>
+      <a:lnStyleLst>
+        <a:ln w="6350" cap="flat" cmpd="sng" algn="ctr">
+          <a:solidFill>
+            <a:schemeClr val="phClr"/>
+          </a:solidFill>
+          <a:prstDash val="solid"/>
+        </a:ln>
+        <a:ln w="6350" cap="flat" cmpd="sng" algn="ctr">
+          <a:solidFill>
+            <a:schemeClr val="phClr"/>
+          </a:solidFill>
+          <a:prstDash val="solid"/>
+        </a:ln>
+        <a:ln w="6350" cap="flat" cmpd="sng" algn="ctr">
+          <a:solidFill>
+            <a:schemeClr val="phClr"/>
+          </a:solidFill>
+          <a:prstDash val="solid"/>
+        </a:ln>
+      </a:lnStyleLst>
+      <a:effectStyleLst>
+        <a:effectStyle>
+          <a:effectLst/>
+        </a:effectStyle>
+        <a:effectStyle>
+          <a:effectLst/>
+        </a:effectStyle>
+        <a:effectStyle>
+          <a:effectLst/>
+        </a:effectStyle>
+      </a:effectStyleLst>
+      <a:bgFillStyleLst>
+        <a:solidFill>
+          <a:schemeClr val="phClr"/>
+        </a:solidFill>
+        <a:solidFill>
+          <a:schemeClr val="phClr"/>
+        </a:solidFill>
+        <a:solidFill>
+          <a:schemeClr val="phClr"/>
+        </a:solidFill>
+      </a:bgFillStyleLst>
+    </a:fmtScheme>
+  </a:themeElements>
+</a:theme>
 </file>